--- a/Project1.pptx
+++ b/Project1.pptx
@@ -110,6 +110,11 @@
       </a:defRPr>
     </a:lvl9pPr>
   </p:defaultTextStyle>
+  <p:extLst>
+    <p:ext uri="{EFAFB233-063F-42B5-8137-9DF3F51BA10A}">
+      <p15:sldGuideLst xmlns:p15="http://schemas.microsoft.com/office/powerpoint/2012/main"/>
+    </p:ext>
+  </p:extLst>
 </p:presentation>
 </file>
 
@@ -318,7 +323,7 @@
           <a:p>
             <a:fld id="{B612D2F0-C725-4AA5-8C46-367B84B1BFC8}" type="datetimeFigureOut">
               <a:rPr lang="en-US" smtClean="0"/>
-              <a:t>9/24/2026</a:t>
+              <a:t>9/25/2026</a:t>
             </a:fld>
             <a:endParaRPr lang="en-US"/>
           </a:p>
@@ -848,7 +853,7 @@
           <a:p>
             <a:fld id="{B612D2F0-C725-4AA5-8C46-367B84B1BFC8}" type="datetimeFigureOut">
               <a:rPr lang="en-US" smtClean="0"/>
-              <a:t>9/24/2026</a:t>
+              <a:t>9/25/2026</a:t>
             </a:fld>
             <a:endParaRPr lang="en-US"/>
           </a:p>
@@ -1404,7 +1409,7 @@
           <a:p>
             <a:fld id="{B612D2F0-C725-4AA5-8C46-367B84B1BFC8}" type="datetimeFigureOut">
               <a:rPr lang="en-US" smtClean="0"/>
-              <a:t>9/24/2026</a:t>
+              <a:t>9/25/2026</a:t>
             </a:fld>
             <a:endParaRPr lang="en-US"/>
           </a:p>
@@ -1877,7 +1882,7 @@
           <a:p>
             <a:fld id="{B612D2F0-C725-4AA5-8C46-367B84B1BFC8}" type="datetimeFigureOut">
               <a:rPr lang="en-US" smtClean="0"/>
-              <a:t>9/24/2026</a:t>
+              <a:t>9/25/2026</a:t>
             </a:fld>
             <a:endParaRPr lang="en-US"/>
           </a:p>
@@ -2521,7 +2526,7 @@
           <a:p>
             <a:fld id="{B612D2F0-C725-4AA5-8C46-367B84B1BFC8}" type="datetimeFigureOut">
               <a:rPr lang="en-US" smtClean="0"/>
-              <a:t>9/24/2026</a:t>
+              <a:t>9/25/2026</a:t>
             </a:fld>
             <a:endParaRPr lang="en-US"/>
           </a:p>
@@ -2990,7 +2995,7 @@
           <a:p>
             <a:fld id="{B612D2F0-C725-4AA5-8C46-367B84B1BFC8}" type="datetimeFigureOut">
               <a:rPr lang="en-US" smtClean="0"/>
-              <a:t>9/24/2026</a:t>
+              <a:t>9/25/2026</a:t>
             </a:fld>
             <a:endParaRPr lang="en-US"/>
           </a:p>
@@ -3559,7 +3564,7 @@
           <a:p>
             <a:fld id="{B612D2F0-C725-4AA5-8C46-367B84B1BFC8}" type="datetimeFigureOut">
               <a:rPr lang="en-US" smtClean="0"/>
-              <a:t>9/24/2026</a:t>
+              <a:t>9/25/2026</a:t>
             </a:fld>
             <a:endParaRPr lang="en-US"/>
           </a:p>
@@ -4034,7 +4039,7 @@
           <a:p>
             <a:fld id="{B612D2F0-C725-4AA5-8C46-367B84B1BFC8}" type="datetimeFigureOut">
               <a:rPr lang="en-US" smtClean="0"/>
-              <a:t>9/24/2026</a:t>
+              <a:t>9/25/2026</a:t>
             </a:fld>
             <a:endParaRPr lang="en-US"/>
           </a:p>
@@ -4449,7 +4454,7 @@
           <a:p>
             <a:fld id="{B612D2F0-C725-4AA5-8C46-367B84B1BFC8}" type="datetimeFigureOut">
               <a:rPr lang="en-US" smtClean="0"/>
-              <a:t>9/24/2026</a:t>
+              <a:t>9/25/2026</a:t>
             </a:fld>
             <a:endParaRPr lang="en-US"/>
           </a:p>
@@ -4873,7 +4878,7 @@
           <a:p>
             <a:fld id="{B612D2F0-C725-4AA5-8C46-367B84B1BFC8}" type="datetimeFigureOut">
               <a:rPr lang="en-US" smtClean="0"/>
-              <a:t>9/24/2026</a:t>
+              <a:t>9/25/2026</a:t>
             </a:fld>
             <a:endParaRPr lang="en-US"/>
           </a:p>
@@ -5235,7 +5240,7 @@
           <a:p>
             <a:fld id="{B612D2F0-C725-4AA5-8C46-367B84B1BFC8}" type="datetimeFigureOut">
               <a:rPr lang="en-US" smtClean="0"/>
-              <a:t>9/24/2026</a:t>
+              <a:t>9/25/2026</a:t>
             </a:fld>
             <a:endParaRPr lang="en-US"/>
           </a:p>
@@ -5643,7 +5648,7 @@
           <a:p>
             <a:fld id="{B612D2F0-C725-4AA5-8C46-367B84B1BFC8}" type="datetimeFigureOut">
               <a:rPr lang="en-US" smtClean="0"/>
-              <a:t>9/24/2026</a:t>
+              <a:t>9/25/2026</a:t>
             </a:fld>
             <a:endParaRPr lang="en-US"/>
           </a:p>
@@ -5994,7 +5999,7 @@
           <a:p>
             <a:fld id="{B612D2F0-C725-4AA5-8C46-367B84B1BFC8}" type="datetimeFigureOut">
               <a:rPr lang="en-US" smtClean="0"/>
-              <a:t>9/24/2026</a:t>
+              <a:t>9/25/2026</a:t>
             </a:fld>
             <a:endParaRPr lang="en-US"/>
           </a:p>
@@ -6358,7 +6363,7 @@
           <a:p>
             <a:fld id="{B612D2F0-C725-4AA5-8C46-367B84B1BFC8}" type="datetimeFigureOut">
               <a:rPr lang="en-US" smtClean="0"/>
-              <a:t>9/24/2026</a:t>
+              <a:t>9/25/2026</a:t>
             </a:fld>
             <a:endParaRPr lang="en-US"/>
           </a:p>
@@ -6783,7 +6788,7 @@
           <a:p>
             <a:fld id="{B612D2F0-C725-4AA5-8C46-367B84B1BFC8}" type="datetimeFigureOut">
               <a:rPr lang="en-US" smtClean="0"/>
-              <a:t>9/24/2026</a:t>
+              <a:t>9/25/2026</a:t>
             </a:fld>
             <a:endParaRPr lang="en-US"/>
           </a:p>
@@ -7366,7 +7371,7 @@
           <a:p>
             <a:fld id="{B612D2F0-C725-4AA5-8C46-367B84B1BFC8}" type="datetimeFigureOut">
               <a:rPr lang="en-US" smtClean="0"/>
-              <a:t>9/24/2026</a:t>
+              <a:t>9/25/2026</a:t>
             </a:fld>
             <a:endParaRPr lang="en-US"/>
           </a:p>
@@ -7668,7 +7673,7 @@
           <a:p>
             <a:fld id="{B612D2F0-C725-4AA5-8C46-367B84B1BFC8}" type="datetimeFigureOut">
               <a:rPr lang="en-US" smtClean="0"/>
-              <a:t>9/24/2026</a:t>
+              <a:t>9/25/2026</a:t>
             </a:fld>
             <a:endParaRPr lang="en-US"/>
           </a:p>
@@ -7920,7 +7925,7 @@
           <a:p>
             <a:fld id="{B612D2F0-C725-4AA5-8C46-367B84B1BFC8}" type="datetimeFigureOut">
               <a:rPr lang="en-US" smtClean="0"/>
-              <a:t>9/24/2026</a:t>
+              <a:t>9/25/2026</a:t>
             </a:fld>
             <a:endParaRPr lang="en-US"/>
           </a:p>
@@ -8232,7 +8237,7 @@
           <a:p>
             <a:fld id="{B612D2F0-C725-4AA5-8C46-367B84B1BFC8}" type="datetimeFigureOut">
               <a:rPr lang="en-US" smtClean="0"/>
-              <a:t>9/24/2026</a:t>
+              <a:t>9/25/2026</a:t>
             </a:fld>
             <a:endParaRPr lang="en-US"/>
           </a:p>
@@ -8675,7 +8680,7 @@
           <a:p>
             <a:fld id="{B612D2F0-C725-4AA5-8C46-367B84B1BFC8}" type="datetimeFigureOut">
               <a:rPr lang="en-US" smtClean="0"/>
-              <a:t>9/24/2026</a:t>
+              <a:t>9/25/2026</a:t>
             </a:fld>
             <a:endParaRPr lang="en-US"/>
           </a:p>
@@ -9094,7 +9099,7 @@
           <a:p>
             <a:fld id="{B612D2F0-C725-4AA5-8C46-367B84B1BFC8}" type="datetimeFigureOut">
               <a:rPr lang="en-US" smtClean="0"/>
-              <a:t>9/24/2026</a:t>
+              <a:t>9/25/2026</a:t>
             </a:fld>
             <a:endParaRPr lang="en-US"/>
           </a:p>
@@ -9499,7 +9504,7 @@
           <a:p>
             <a:fld id="{B612D2F0-C725-4AA5-8C46-367B84B1BFC8}" type="datetimeFigureOut">
               <a:rPr lang="en-US" smtClean="0"/>
-              <a:t>9/24/2026</a:t>
+              <a:t>9/25/2026</a:t>
             </a:fld>
             <a:endParaRPr lang="en-US"/>
           </a:p>
@@ -9786,7 +9791,7 @@
           <a:p>
             <a:fld id="{B612D2F0-C725-4AA5-8C46-367B84B1BFC8}" type="datetimeFigureOut">
               <a:rPr lang="en-US" smtClean="0"/>
-              <a:t>9/24/2026</a:t>
+              <a:t>9/25/2026</a:t>
             </a:fld>
             <a:endParaRPr lang="en-US"/>
           </a:p>
@@ -10296,7 +10301,7 @@
           <a:p>
             <a:fld id="{B612D2F0-C725-4AA5-8C46-367B84B1BFC8}" type="datetimeFigureOut">
               <a:rPr lang="en-US" smtClean="0"/>
-              <a:t>9/24/2026</a:t>
+              <a:t>9/25/2026</a:t>
             </a:fld>
             <a:endParaRPr lang="en-US"/>
           </a:p>
@@ -10713,7 +10718,7 @@
           <a:p>
             <a:fld id="{B612D2F0-C725-4AA5-8C46-367B84B1BFC8}" type="datetimeFigureOut">
               <a:rPr lang="en-US" smtClean="0"/>
-              <a:t>9/24/2026</a:t>
+              <a:t>9/25/2026</a:t>
             </a:fld>
             <a:endParaRPr lang="en-US"/>
           </a:p>
@@ -11022,7 +11027,7 @@
           <a:p>
             <a:fld id="{B612D2F0-C725-4AA5-8C46-367B84B1BFC8}" type="datetimeFigureOut">
               <a:rPr lang="en-US" smtClean="0"/>
-              <a:t>9/24/2026</a:t>
+              <a:t>9/25/2026</a:t>
             </a:fld>
             <a:endParaRPr lang="en-US"/>
           </a:p>
@@ -11385,7 +11390,7 @@
           <a:p>
             <a:fld id="{B612D2F0-C725-4AA5-8C46-367B84B1BFC8}" type="datetimeFigureOut">
               <a:rPr lang="en-US" smtClean="0"/>
-              <a:t>9/24/2026</a:t>
+              <a:t>9/25/2026</a:t>
             </a:fld>
             <a:endParaRPr lang="en-US"/>
           </a:p>
@@ -11758,7 +11763,7 @@
           <a:p>
             <a:fld id="{B612D2F0-C725-4AA5-8C46-367B84B1BFC8}" type="datetimeFigureOut">
               <a:rPr lang="en-US" smtClean="0"/>
-              <a:t>9/24/2026</a:t>
+              <a:t>9/25/2026</a:t>
             </a:fld>
             <a:endParaRPr lang="en-US"/>
           </a:p>
@@ -13256,7 +13261,7 @@
             </a:r>
             <a:r>
               <a:rPr lang="en-US" sz="1100" dirty="0"/>
-              <a:t>.,</a:t>
+              <a:t>,</a:t>
             </a:r>
           </a:p>
           <a:p>
@@ -13699,7 +13704,7 @@
             <p:ph idx="1"/>
             <p:extLst>
               <p:ext uri="{D42A27DB-BD31-4B8C-83A1-F6EECF244321}">
-                <p14:modId xmlns:p14="http://schemas.microsoft.com/office/powerpoint/2010/main" val="2485568055"/>
+                <p14:modId xmlns:p14="http://schemas.microsoft.com/office/powerpoint/2010/main" val="3827154303"/>
               </p:ext>
             </p:extLst>
           </p:nvPr>
@@ -13787,7 +13792,7 @@
                     <a:p>
                       <a:r>
                         <a:rPr lang="en-US" dirty="0"/>
-                        <a:t>PostgreSQL – Persistent Relational Database storing accounts, balanced, hashed PINs, and transaction history.</a:t>
+                        <a:t>PostgreSQL – Persistent Relational Database storing accounts, balances, hashed PINs, and transaction history.</a:t>
                       </a:r>
                     </a:p>
                   </a:txBody>
